--- a/docs/presentation/Presentation.pptx
+++ b/docs/presentation/Presentation.pptx
@@ -14,10 +14,6 @@
     <p:sldId id="262" r:id="rId13"/>
     <p:sldId id="263" r:id="rId14"/>
     <p:sldId id="264" r:id="rId15"/>
-    <p:sldId id="265" r:id="rId16"/>
-    <p:sldId id="266" r:id="rId17"/>
-    <p:sldId id="267" r:id="rId18"/>
-    <p:sldId id="268" r:id="rId19"/>
   </p:sldIdLst>
   <p:sldSz cx="12191695" cy="6858000" type="screen4x3"/>
   <p:notesSz cx="6858000" cy="9144000"/>
@@ -3415,1618 +3411,6 @@
             </a:pPr>
             <a:r>
               <a:t>• Submitted to: [Name of the Faculty] | Academic Session: August – December 2026</a:t>
-            </a:r>
-          </a:p>
-        </p:txBody>
-      </p:sp>
-    </p:spTree>
-  </p:cSld>
-  <p:clrMapOvr>
-    <a:masterClrMapping/>
-  </p:clrMapOvr>
-</p:sld>
-</file>
-
-<file path=ppt/slides/slide10.xml><?xml version="1.0" encoding="utf-8"?>
-<p:sld xmlns:a="http://schemas.openxmlformats.org/drawingml/2006/main" xmlns:p="http://schemas.openxmlformats.org/presentationml/2006/main" xmlns:r="http://schemas.openxmlformats.org/officeDocument/2006/relationships">
-  <p:cSld>
-    <p:spTree>
-      <p:nvGrpSpPr>
-        <p:cNvPr id="1" name=""/>
-        <p:cNvGrpSpPr/>
-        <p:nvPr/>
-      </p:nvGrpSpPr>
-      <p:grpSpPr/>
-      <p:sp>
-        <p:nvSpPr>
-          <p:cNvPr id="2" name="Rectangle 1"/>
-          <p:cNvSpPr/>
-          <p:nvPr/>
-        </p:nvSpPr>
-        <p:spPr>
-          <a:xfrm>
-            <a:off x="0" y="0"/>
-            <a:ext cx="12191695" cy="1051560"/>
-          </a:xfrm>
-          <a:prstGeom prst="rect">
-            <a:avLst/>
-          </a:prstGeom>
-          <a:solidFill>
-            <a:srgbClr val="002B49"/>
-          </a:solidFill>
-          <a:ln>
-            <a:noFill/>
-          </a:ln>
-        </p:spPr>
-        <p:style>
-          <a:lnRef idx="1">
-            <a:schemeClr val="accent1"/>
-          </a:lnRef>
-          <a:fillRef idx="3">
-            <a:schemeClr val="accent1"/>
-          </a:fillRef>
-          <a:effectRef idx="2">
-            <a:schemeClr val="accent1"/>
-          </a:effectRef>
-          <a:fontRef idx="minor">
-            <a:schemeClr val="lt1"/>
-          </a:fontRef>
-        </p:style>
-        <p:txBody>
-          <a:bodyPr rtlCol="0" anchor="ctr" wrap="square" lIns="731520" tIns="164592" bIns="0"/>
-          <a:lstStyle/>
-          <a:p>
-            <a:pPr algn="ctr">
-              <a:defRPr sz="1050" b="1">
-                <a:solidFill>
-                  <a:srgbClr val="E87722"/>
-                </a:solidFill>
-                <a:latin typeface="Calibri"/>
-              </a:defRPr>
-            </a:pPr>
-            <a:r>
-              <a:t>UCS503: SOFTWARE ENGINEERING LAB EVALUATION 1</a:t>
-            </a:r>
-          </a:p>
-          <a:p>
-            <a:pPr>
-              <a:defRPr sz="2200" b="1">
-                <a:solidFill>
-                  <a:srgbClr val="FFFFFF"/>
-                </a:solidFill>
-                <a:latin typeface="Arial"/>
-              </a:defRPr>
-            </a:pPr>
-            <a:r>
-              <a:t>Decoding Dream Activity: Hall-Van de Castle Standard Archetypes</a:t>
-            </a:r>
-          </a:p>
-        </p:txBody>
-      </p:sp>
-      <p:sp>
-        <p:nvSpPr>
-          <p:cNvPr id="3" name="Rectangle 2"/>
-          <p:cNvSpPr/>
-          <p:nvPr/>
-        </p:nvSpPr>
-        <p:spPr>
-          <a:xfrm>
-            <a:off x="0" y="1051560"/>
-            <a:ext cx="12191695" cy="73152"/>
-          </a:xfrm>
-          <a:prstGeom prst="rect">
-            <a:avLst/>
-          </a:prstGeom>
-          <a:solidFill>
-            <a:srgbClr val="E87722"/>
-          </a:solidFill>
-          <a:ln>
-            <a:noFill/>
-          </a:ln>
-        </p:spPr>
-        <p:style>
-          <a:lnRef idx="1">
-            <a:schemeClr val="accent1"/>
-          </a:lnRef>
-          <a:fillRef idx="3">
-            <a:schemeClr val="accent1"/>
-          </a:fillRef>
-          <a:effectRef idx="2">
-            <a:schemeClr val="accent1"/>
-          </a:effectRef>
-          <a:fontRef idx="minor">
-            <a:schemeClr val="lt1"/>
-          </a:fontRef>
-        </p:style>
-        <p:txBody>
-          <a:bodyPr rtlCol="0" anchor="ctr"/>
-          <a:lstStyle/>
-          <a:p>
-            <a:pPr algn="ctr"/>
-          </a:p>
-        </p:txBody>
-      </p:sp>
-      <p:sp>
-        <p:nvSpPr>
-          <p:cNvPr id="4" name="TextBox 3"/>
-          <p:cNvSpPr txBox="1"/>
-          <p:nvPr/>
-        </p:nvSpPr>
-        <p:spPr>
-          <a:xfrm>
-            <a:off x="731520" y="6446520"/>
-            <a:ext cx="10728655" cy="320040"/>
-          </a:xfrm>
-          <a:prstGeom prst="rect">
-            <a:avLst/>
-          </a:prstGeom>
-          <a:noFill/>
-        </p:spPr>
-        <p:txBody>
-          <a:bodyPr wrap="none" lIns="0" tIns="0" bIns="0" rIns="0">
-            <a:spAutoFit/>
-          </a:bodyPr>
-          <a:lstStyle/>
-          <a:p>
-            <a:pPr>
-              <a:defRPr sz="950">
-                <a:solidFill>
-                  <a:srgbClr val="6B7280"/>
-                </a:solidFill>
-                <a:latin typeface="Calibri"/>
-              </a:defRPr>
-            </a:pPr>
-            <a:r>
-              <a:t>Department of Computer Science &amp; Engineering • Thapar Institute of Engineering &amp; Technology, Patiala</a:t>
-            </a:r>
-          </a:p>
-        </p:txBody>
-      </p:sp>
-      <p:sp>
-        <p:nvSpPr>
-          <p:cNvPr id="5" name="Rounded Rectangle 4"/>
-          <p:cNvSpPr/>
-          <p:nvPr/>
-        </p:nvSpPr>
-        <p:spPr>
-          <a:xfrm>
-            <a:off x="731520" y="1463040"/>
-            <a:ext cx="5120640" cy="4663440"/>
-          </a:xfrm>
-          <a:prstGeom prst="roundRect">
-            <a:avLst/>
-          </a:prstGeom>
-          <a:solidFill>
-            <a:srgbClr val="F8FAFC"/>
-          </a:solidFill>
-          <a:ln w="12700">
-            <a:solidFill>
-              <a:srgbClr val="E2E8F0"/>
-            </a:solidFill>
-          </a:ln>
-        </p:spPr>
-        <p:style>
-          <a:lnRef idx="1">
-            <a:schemeClr val="accent1"/>
-          </a:lnRef>
-          <a:fillRef idx="3">
-            <a:schemeClr val="accent1"/>
-          </a:fillRef>
-          <a:effectRef idx="2">
-            <a:schemeClr val="accent1"/>
-          </a:effectRef>
-          <a:fontRef idx="minor">
-            <a:schemeClr val="lt1"/>
-          </a:fontRef>
-        </p:style>
-        <p:txBody>
-          <a:bodyPr rtlCol="0" anchor="ctr" wrap="square" lIns="320040" rIns="320040" tIns="320040"/>
-          <a:lstStyle/>
-          <a:p>
-            <a:pPr algn="ctr">
-              <a:spcAft>
-                <a:spcPts val="1200"/>
-              </a:spcAft>
-              <a:defRPr sz="1400" b="1">
-                <a:solidFill>
-                  <a:srgbClr val="002B49"/>
-                </a:solidFill>
-                <a:latin typeface="Arial"/>
-              </a:defRPr>
-            </a:pPr>
-            <a:r>
-              <a:t>Beyond Binary 'Calm vs Stressed'</a:t>
-            </a:r>
-          </a:p>
-          <a:p>
-            <a:pPr>
-              <a:spcAft>
-                <a:spcPts val="700"/>
-              </a:spcAft>
-              <a:defRPr sz="1150">
-                <a:solidFill>
-                  <a:srgbClr val="1F2937"/>
-                </a:solidFill>
-                <a:latin typeface="Calibri"/>
-              </a:defRPr>
-            </a:pPr>
-            <a:r>
-              <a:t>• Clinical Psychology Standard: Incorporates the Hall-Van de Castle (HVdC) dream content coding system.</a:t>
-            </a:r>
-          </a:p>
-          <a:p>
-            <a:pPr>
-              <a:spcAft>
-                <a:spcPts val="700"/>
-              </a:spcAft>
-              <a:defRPr sz="1150">
-                <a:solidFill>
-                  <a:srgbClr val="1F2937"/>
-                </a:solidFill>
-                <a:latin typeface="Calibri"/>
-              </a:defRPr>
-            </a:pPr>
-            <a:r>
-              <a:t>• 1. Motor Agitation: Sensorimotor mu-rhythm &amp; beta desynchronization (running/falling).</a:t>
-            </a:r>
-          </a:p>
-          <a:p>
-            <a:pPr>
-              <a:spcAft>
-                <a:spcPts val="700"/>
-              </a:spcAft>
-              <a:defRPr sz="1150">
-                <a:solidFill>
-                  <a:srgbClr val="1F2937"/>
-                </a:solidFill>
-                <a:latin typeface="Calibri"/>
-              </a:defRPr>
-            </a:pPr>
-            <a:r>
-              <a:t>• 2. Threat Simulation: Beta/gamma power surge with right temporal asymmetry (PTSD nightmares).</a:t>
-            </a:r>
-          </a:p>
-          <a:p>
-            <a:pPr>
-              <a:spcAft>
-                <a:spcPts val="700"/>
-              </a:spcAft>
-              <a:defRPr sz="1150">
-                <a:solidFill>
-                  <a:srgbClr val="1F2937"/>
-                </a:solidFill>
-                <a:latin typeface="Calibri"/>
-              </a:defRPr>
-            </a:pPr>
-            <a:r>
-              <a:t>• 3. Vivid Sensory: Theta burst synchrony across temporal-occipital pathways (visual scenes).</a:t>
-            </a:r>
-          </a:p>
-          <a:p>
-            <a:pPr>
-              <a:spcAft>
-                <a:spcPts val="700"/>
-              </a:spcAft>
-              <a:defRPr sz="1150">
-                <a:solidFill>
-                  <a:srgbClr val="1F2937"/>
-                </a:solidFill>
-                <a:latin typeface="Calibri"/>
-              </a:defRPr>
-            </a:pPr>
-            <a:r>
-              <a:t>• 4. Verbal Cognitive: Frontal-temporal theta coherence (internal dialogue).</a:t>
-            </a:r>
-          </a:p>
-          <a:p>
-            <a:pPr>
-              <a:spcAft>
-                <a:spcPts val="700"/>
-              </a:spcAft>
-              <a:defRPr sz="1150">
-                <a:solidFill>
-                  <a:srgbClr val="1F2937"/>
-                </a:solidFill>
-                <a:latin typeface="Calibri"/>
-              </a:defRPr>
-            </a:pPr>
-            <a:r>
-              <a:t>• 5. Restful Drift: Symmetric alpha rhythms (calm baseline sleep).</a:t>
-            </a:r>
-          </a:p>
-        </p:txBody>
-      </p:sp>
-      <p:sp>
-        <p:nvSpPr>
-          <p:cNvPr id="6" name="Rounded Rectangle 5"/>
-          <p:cNvSpPr/>
-          <p:nvPr/>
-        </p:nvSpPr>
-        <p:spPr>
-          <a:xfrm>
-            <a:off x="6309360" y="1463040"/>
-            <a:ext cx="5120640" cy="4663440"/>
-          </a:xfrm>
-          <a:prstGeom prst="roundRect">
-            <a:avLst/>
-          </a:prstGeom>
-          <a:solidFill>
-            <a:srgbClr val="F8FAFC"/>
-          </a:solidFill>
-          <a:ln w="12700">
-            <a:solidFill>
-              <a:srgbClr val="E2E8F0"/>
-            </a:solidFill>
-          </a:ln>
-        </p:spPr>
-        <p:style>
-          <a:lnRef idx="1">
-            <a:schemeClr val="accent1"/>
-          </a:lnRef>
-          <a:fillRef idx="3">
-            <a:schemeClr val="accent1"/>
-          </a:fillRef>
-          <a:effectRef idx="2">
-            <a:schemeClr val="accent1"/>
-          </a:effectRef>
-          <a:fontRef idx="minor">
-            <a:schemeClr val="lt1"/>
-          </a:fontRef>
-        </p:style>
-        <p:txBody>
-          <a:bodyPr rtlCol="0" anchor="ctr" wrap="square" lIns="320040" rIns="320040" tIns="320040"/>
-          <a:lstStyle/>
-          <a:p>
-            <a:pPr algn="ctr">
-              <a:spcAft>
-                <a:spcPts val="1200"/>
-              </a:spcAft>
-              <a:defRPr sz="1400" b="1">
-                <a:solidFill>
-                  <a:srgbClr val="002B49"/>
-                </a:solidFill>
-                <a:latin typeface="Arial"/>
-              </a:defRPr>
-            </a:pPr>
-            <a:r>
-              <a:t>Automated Clinical Narrative Synthesis</a:t>
-            </a:r>
-          </a:p>
-          <a:p>
-            <a:pPr>
-              <a:spcAft>
-                <a:spcPts val="700"/>
-              </a:spcAft>
-              <a:defRPr sz="1150">
-                <a:solidFill>
-                  <a:srgbClr val="1F2937"/>
-                </a:solidFill>
-                <a:latin typeface="Calibri"/>
-              </a:defRPr>
-            </a:pPr>
-            <a:r>
-              <a:t>• Converts decoded neural feature vectors into structured clinical summaries for attending psychiatrists.</a:t>
-            </a:r>
-          </a:p>
-          <a:p>
-            <a:pPr>
-              <a:spcAft>
-                <a:spcPts val="700"/>
-              </a:spcAft>
-              <a:defRPr sz="1150">
-                <a:solidFill>
-                  <a:srgbClr val="1F2937"/>
-                </a:solidFill>
-                <a:latin typeface="Calibri"/>
-              </a:defRPr>
-            </a:pPr>
-            <a:r>
-              <a:t>• Example Generated Event: '03:24 AM: Subject experienced an acute 4-minute Threat Simulation episode with negative valence (-0.84) and severe motor agitation.'</a:t>
-            </a:r>
-          </a:p>
-          <a:p>
-            <a:pPr>
-              <a:spcAft>
-                <a:spcPts val="700"/>
-              </a:spcAft>
-              <a:defRPr sz="1150">
-                <a:solidFill>
-                  <a:srgbClr val="1F2937"/>
-                </a:solidFill>
-                <a:latin typeface="Calibri"/>
-              </a:defRPr>
-            </a:pPr>
-            <a:r>
-              <a:t>• Provides an objective nocturnal trauma timeline for PTSD therapy.</a:t>
-            </a:r>
-          </a:p>
-        </p:txBody>
-      </p:sp>
-    </p:spTree>
-  </p:cSld>
-  <p:clrMapOvr>
-    <a:masterClrMapping/>
-  </p:clrMapOvr>
-</p:sld>
-</file>
-
-<file path=ppt/slides/slide11.xml><?xml version="1.0" encoding="utf-8"?>
-<p:sld xmlns:a="http://schemas.openxmlformats.org/drawingml/2006/main" xmlns:p="http://schemas.openxmlformats.org/presentationml/2006/main" xmlns:r="http://schemas.openxmlformats.org/officeDocument/2006/relationships">
-  <p:cSld>
-    <p:spTree>
-      <p:nvGrpSpPr>
-        <p:cNvPr id="1" name=""/>
-        <p:cNvGrpSpPr/>
-        <p:nvPr/>
-      </p:nvGrpSpPr>
-      <p:grpSpPr/>
-      <p:sp>
-        <p:nvSpPr>
-          <p:cNvPr id="2" name="Rectangle 1"/>
-          <p:cNvSpPr/>
-          <p:nvPr/>
-        </p:nvSpPr>
-        <p:spPr>
-          <a:xfrm>
-            <a:off x="0" y="0"/>
-            <a:ext cx="12191695" cy="1051560"/>
-          </a:xfrm>
-          <a:prstGeom prst="rect">
-            <a:avLst/>
-          </a:prstGeom>
-          <a:solidFill>
-            <a:srgbClr val="002B49"/>
-          </a:solidFill>
-          <a:ln>
-            <a:noFill/>
-          </a:ln>
-        </p:spPr>
-        <p:style>
-          <a:lnRef idx="1">
-            <a:schemeClr val="accent1"/>
-          </a:lnRef>
-          <a:fillRef idx="3">
-            <a:schemeClr val="accent1"/>
-          </a:fillRef>
-          <a:effectRef idx="2">
-            <a:schemeClr val="accent1"/>
-          </a:effectRef>
-          <a:fontRef idx="minor">
-            <a:schemeClr val="lt1"/>
-          </a:fontRef>
-        </p:style>
-        <p:txBody>
-          <a:bodyPr rtlCol="0" anchor="ctr" wrap="square" lIns="731520" tIns="164592" bIns="0"/>
-          <a:lstStyle/>
-          <a:p>
-            <a:pPr algn="ctr">
-              <a:defRPr sz="1050" b="1">
-                <a:solidFill>
-                  <a:srgbClr val="E87722"/>
-                </a:solidFill>
-                <a:latin typeface="Calibri"/>
-              </a:defRPr>
-            </a:pPr>
-            <a:r>
-              <a:t>WHITEBOARD CHECKLIST ITEM 6: DOCUMENT</a:t>
-            </a:r>
-          </a:p>
-          <a:p>
-            <a:pPr>
-              <a:defRPr sz="2200" b="1">
-                <a:solidFill>
-                  <a:srgbClr val="FFFFFF"/>
-                </a:solidFill>
-                <a:latin typeface="Arial"/>
-              </a:defRPr>
-            </a:pPr>
-            <a:r>
-              <a:t>Documentation Deliverables &amp; Mid-Semester Status</a:t>
-            </a:r>
-          </a:p>
-        </p:txBody>
-      </p:sp>
-      <p:sp>
-        <p:nvSpPr>
-          <p:cNvPr id="3" name="Rectangle 2"/>
-          <p:cNvSpPr/>
-          <p:nvPr/>
-        </p:nvSpPr>
-        <p:spPr>
-          <a:xfrm>
-            <a:off x="0" y="1051560"/>
-            <a:ext cx="12191695" cy="73152"/>
-          </a:xfrm>
-          <a:prstGeom prst="rect">
-            <a:avLst/>
-          </a:prstGeom>
-          <a:solidFill>
-            <a:srgbClr val="E87722"/>
-          </a:solidFill>
-          <a:ln>
-            <a:noFill/>
-          </a:ln>
-        </p:spPr>
-        <p:style>
-          <a:lnRef idx="1">
-            <a:schemeClr val="accent1"/>
-          </a:lnRef>
-          <a:fillRef idx="3">
-            <a:schemeClr val="accent1"/>
-          </a:fillRef>
-          <a:effectRef idx="2">
-            <a:schemeClr val="accent1"/>
-          </a:effectRef>
-          <a:fontRef idx="minor">
-            <a:schemeClr val="lt1"/>
-          </a:fontRef>
-        </p:style>
-        <p:txBody>
-          <a:bodyPr rtlCol="0" anchor="ctr"/>
-          <a:lstStyle/>
-          <a:p>
-            <a:pPr algn="ctr"/>
-          </a:p>
-        </p:txBody>
-      </p:sp>
-      <p:sp>
-        <p:nvSpPr>
-          <p:cNvPr id="4" name="TextBox 3"/>
-          <p:cNvSpPr txBox="1"/>
-          <p:nvPr/>
-        </p:nvSpPr>
-        <p:spPr>
-          <a:xfrm>
-            <a:off x="731520" y="6446520"/>
-            <a:ext cx="10728655" cy="320040"/>
-          </a:xfrm>
-          <a:prstGeom prst="rect">
-            <a:avLst/>
-          </a:prstGeom>
-          <a:noFill/>
-        </p:spPr>
-        <p:txBody>
-          <a:bodyPr wrap="none" lIns="0" tIns="0" bIns="0" rIns="0">
-            <a:spAutoFit/>
-          </a:bodyPr>
-          <a:lstStyle/>
-          <a:p>
-            <a:pPr>
-              <a:defRPr sz="950">
-                <a:solidFill>
-                  <a:srgbClr val="6B7280"/>
-                </a:solidFill>
-                <a:latin typeface="Calibri"/>
-              </a:defRPr>
-            </a:pPr>
-            <a:r>
-              <a:t>Department of Computer Science &amp; Engineering • Thapar Institute of Engineering &amp; Technology, Patiala</a:t>
-            </a:r>
-          </a:p>
-        </p:txBody>
-      </p:sp>
-      <p:sp>
-        <p:nvSpPr>
-          <p:cNvPr id="5" name="Rounded Rectangle 4"/>
-          <p:cNvSpPr/>
-          <p:nvPr/>
-        </p:nvSpPr>
-        <p:spPr>
-          <a:xfrm>
-            <a:off x="731520" y="1463040"/>
-            <a:ext cx="5120640" cy="4663440"/>
-          </a:xfrm>
-          <a:prstGeom prst="roundRect">
-            <a:avLst/>
-          </a:prstGeom>
-          <a:solidFill>
-            <a:srgbClr val="F8FAFC"/>
-          </a:solidFill>
-          <a:ln w="12700">
-            <a:solidFill>
-              <a:srgbClr val="E2E8F0"/>
-            </a:solidFill>
-          </a:ln>
-        </p:spPr>
-        <p:style>
-          <a:lnRef idx="1">
-            <a:schemeClr val="accent1"/>
-          </a:lnRef>
-          <a:fillRef idx="3">
-            <a:schemeClr val="accent1"/>
-          </a:fillRef>
-          <a:effectRef idx="2">
-            <a:schemeClr val="accent1"/>
-          </a:effectRef>
-          <a:fontRef idx="minor">
-            <a:schemeClr val="lt1"/>
-          </a:fontRef>
-        </p:style>
-        <p:txBody>
-          <a:bodyPr rtlCol="0" anchor="ctr" wrap="square" lIns="320040" rIns="320040" tIns="320040"/>
-          <a:lstStyle/>
-          <a:p>
-            <a:pPr algn="ctr">
-              <a:spcAft>
-                <a:spcPts val="1200"/>
-              </a:spcAft>
-              <a:defRPr sz="1400" b="1">
-                <a:solidFill>
-                  <a:srgbClr val="002B49"/>
-                </a:solidFill>
-                <a:latin typeface="Arial"/>
-              </a:defRPr>
-            </a:pPr>
-            <a:r>
-              <a:t>Completed Course Deliverables</a:t>
-            </a:r>
-          </a:p>
-          <a:p>
-            <a:pPr>
-              <a:spcAft>
-                <a:spcPts val="700"/>
-              </a:spcAft>
-              <a:defRPr sz="1150">
-                <a:solidFill>
-                  <a:srgbClr val="1F2937"/>
-                </a:solidFill>
-                <a:latin typeface="Calibri"/>
-              </a:defRPr>
-            </a:pPr>
-            <a:r>
-              <a:t>• Lab Evaluation 1 Report: Conforms verbatim to Lab Eval I Template.pdf (Cover Page, Software Bid, Overview, Use Cases, Activity with Swimlanes, DFDs, IEEE SRS, User Stories).</a:t>
-            </a:r>
-          </a:p>
-          <a:p>
-            <a:pPr>
-              <a:spcAft>
-                <a:spcPts val="700"/>
-              </a:spcAft>
-              <a:defRPr sz="1150">
-                <a:solidFill>
-                  <a:srgbClr val="1F2937"/>
-                </a:solidFill>
-                <a:latin typeface="Calibri"/>
-              </a:defRPr>
-            </a:pPr>
-            <a:r>
-              <a:t>• Academic Project Proposal: Structured according to project purposal.pdf (SMART objectives, 450-word methodology, 17-week Gantt timeline, zero-cost budget).</a:t>
-            </a:r>
-          </a:p>
-          <a:p>
-            <a:pPr>
-              <a:spcAft>
-                <a:spcPts val="700"/>
-              </a:spcAft>
-              <a:defRPr sz="1150">
-                <a:solidFill>
-                  <a:srgbClr val="1F2937"/>
-                </a:solidFill>
-                <a:latin typeface="Calibri"/>
-              </a:defRPr>
-            </a:pPr>
-            <a:r>
-              <a:t>• UCS503 Lab Journal: Complete LaTeX diary covering Weeks 1 to 7 with instructor sign-offs.</a:t>
-            </a:r>
-          </a:p>
-          <a:p>
-            <a:pPr>
-              <a:spcAft>
-                <a:spcPts val="700"/>
-              </a:spcAft>
-              <a:defRPr sz="1150">
-                <a:solidFill>
-                  <a:srgbClr val="1F2937"/>
-                </a:solidFill>
-                <a:latin typeface="Calibri"/>
-              </a:defRPr>
-            </a:pPr>
-            <a:r>
-              <a:t>• Evaluation Presentation: Complete 13-slide academic presentation deck.</a:t>
-            </a:r>
-          </a:p>
-        </p:txBody>
-      </p:sp>
-      <p:sp>
-        <p:nvSpPr>
-          <p:cNvPr id="6" name="Rounded Rectangle 5"/>
-          <p:cNvSpPr/>
-          <p:nvPr/>
-        </p:nvSpPr>
-        <p:spPr>
-          <a:xfrm>
-            <a:off x="6309360" y="1463040"/>
-            <a:ext cx="5120640" cy="4663440"/>
-          </a:xfrm>
-          <a:prstGeom prst="roundRect">
-            <a:avLst/>
-          </a:prstGeom>
-          <a:solidFill>
-            <a:srgbClr val="F8FAFC"/>
-          </a:solidFill>
-          <a:ln w="12700">
-            <a:solidFill>
-              <a:srgbClr val="E2E8F0"/>
-            </a:solidFill>
-          </a:ln>
-        </p:spPr>
-        <p:style>
-          <a:lnRef idx="1">
-            <a:schemeClr val="accent1"/>
-          </a:lnRef>
-          <a:fillRef idx="3">
-            <a:schemeClr val="accent1"/>
-          </a:fillRef>
-          <a:effectRef idx="2">
-            <a:schemeClr val="accent1"/>
-          </a:effectRef>
-          <a:fontRef idx="minor">
-            <a:schemeClr val="lt1"/>
-          </a:fontRef>
-        </p:style>
-        <p:txBody>
-          <a:bodyPr rtlCol="0" anchor="ctr" wrap="square" lIns="320040" rIns="320040" tIns="320040"/>
-          <a:lstStyle/>
-          <a:p>
-            <a:pPr algn="ctr">
-              <a:spcAft>
-                <a:spcPts val="1200"/>
-              </a:spcAft>
-              <a:defRPr sz="1400" b="1">
-                <a:solidFill>
-                  <a:srgbClr val="002B49"/>
-                </a:solidFill>
-                <a:latin typeface="Arial"/>
-              </a:defRPr>
-            </a:pPr>
-            <a:r>
-              <a:t>Current Prototype &amp; Readiness Status</a:t>
-            </a:r>
-          </a:p>
-          <a:p>
-            <a:pPr>
-              <a:spcAft>
-                <a:spcPts val="700"/>
-              </a:spcAft>
-              <a:defRPr sz="1150">
-                <a:solidFill>
-                  <a:srgbClr val="1F2937"/>
-                </a:solidFill>
-                <a:latin typeface="Calibri"/>
-              </a:defRPr>
-            </a:pPr>
-            <a:r>
-              <a:t>• PhysioNet Sleep-EDFx Data Pipeline: Validated 128 Hz dual-channel telemetry ingestion.</a:t>
-            </a:r>
-          </a:p>
-          <a:p>
-            <a:pPr>
-              <a:spcAft>
-                <a:spcPts val="700"/>
-              </a:spcAft>
-              <a:defRPr sz="1150">
-                <a:solidFill>
-                  <a:srgbClr val="1F2937"/>
-                </a:solidFill>
-                <a:latin typeface="Calibri"/>
-              </a:defRPr>
-            </a:pPr>
-            <a:r>
-              <a:t>• Digital Filter Implementation: Zero-phase 4th-order Butterworth (0.5–45 Hz) and 50 Hz notch verified via automated tests.</a:t>
-            </a:r>
-          </a:p>
-          <a:p>
-            <a:pPr>
-              <a:spcAft>
-                <a:spcPts val="700"/>
-              </a:spcAft>
-              <a:defRPr sz="1150">
-                <a:solidFill>
-                  <a:srgbClr val="1F2937"/>
-                </a:solidFill>
-                <a:latin typeface="Calibri"/>
-              </a:defRPr>
-            </a:pPr>
-            <a:r>
-              <a:t>• TinyML Benchmark: DC-CTA Net achieves 2.45 ms inference latency per 2.0s epoch on standard CPU (&lt; 0.65 MFLOPs).</a:t>
-            </a:r>
-          </a:p>
-          <a:p>
-            <a:pPr>
-              <a:spcAft>
-                <a:spcPts val="700"/>
-              </a:spcAft>
-              <a:defRPr sz="1150">
-                <a:solidFill>
-                  <a:srgbClr val="1F2937"/>
-                </a:solidFill>
-                <a:latin typeface="Calibri"/>
-              </a:defRPr>
-            </a:pPr>
-            <a:r>
-              <a:t>• 100% Prepared for Mid-Semester Lab Evaluation Viva &amp; Technical Walkthrough.</a:t>
-            </a:r>
-          </a:p>
-        </p:txBody>
-      </p:sp>
-    </p:spTree>
-  </p:cSld>
-  <p:clrMapOvr>
-    <a:masterClrMapping/>
-  </p:clrMapOvr>
-</p:sld>
-</file>
-
-<file path=ppt/slides/slide12.xml><?xml version="1.0" encoding="utf-8"?>
-<p:sld xmlns:a="http://schemas.openxmlformats.org/drawingml/2006/main" xmlns:p="http://schemas.openxmlformats.org/presentationml/2006/main" xmlns:r="http://schemas.openxmlformats.org/officeDocument/2006/relationships">
-  <p:cSld>
-    <p:spTree>
-      <p:nvGrpSpPr>
-        <p:cNvPr id="1" name=""/>
-        <p:cNvGrpSpPr/>
-        <p:nvPr/>
-      </p:nvGrpSpPr>
-      <p:grpSpPr/>
-      <p:sp>
-        <p:nvSpPr>
-          <p:cNvPr id="2" name="Rectangle 1"/>
-          <p:cNvSpPr/>
-          <p:nvPr/>
-        </p:nvSpPr>
-        <p:spPr>
-          <a:xfrm>
-            <a:off x="0" y="0"/>
-            <a:ext cx="12191695" cy="1051560"/>
-          </a:xfrm>
-          <a:prstGeom prst="rect">
-            <a:avLst/>
-          </a:prstGeom>
-          <a:solidFill>
-            <a:srgbClr val="002B49"/>
-          </a:solidFill>
-          <a:ln>
-            <a:noFill/>
-          </a:ln>
-        </p:spPr>
-        <p:style>
-          <a:lnRef idx="1">
-            <a:schemeClr val="accent1"/>
-          </a:lnRef>
-          <a:fillRef idx="3">
-            <a:schemeClr val="accent1"/>
-          </a:fillRef>
-          <a:effectRef idx="2">
-            <a:schemeClr val="accent1"/>
-          </a:effectRef>
-          <a:fontRef idx="minor">
-            <a:schemeClr val="lt1"/>
-          </a:fontRef>
-        </p:style>
-        <p:txBody>
-          <a:bodyPr rtlCol="0" anchor="ctr" wrap="square" lIns="731520" tIns="164592" bIns="0"/>
-          <a:lstStyle/>
-          <a:p>
-            <a:pPr algn="ctr">
-              <a:defRPr sz="1050" b="1">
-                <a:solidFill>
-                  <a:srgbClr val="E87722"/>
-                </a:solidFill>
-                <a:latin typeface="Calibri"/>
-              </a:defRPr>
-            </a:pPr>
-            <a:r>
-              <a:t>UCS503: SOFTWARE ENGINEERING LAB EVALUATION 1</a:t>
-            </a:r>
-          </a:p>
-          <a:p>
-            <a:pPr>
-              <a:defRPr sz="2200" b="1">
-                <a:solidFill>
-                  <a:srgbClr val="FFFFFF"/>
-                </a:solidFill>
-                <a:latin typeface="Arial"/>
-              </a:defRPr>
-            </a:pPr>
-            <a:r>
-              <a:t>Testing, Verification &amp; Performance Benchmarking</a:t>
-            </a:r>
-          </a:p>
-        </p:txBody>
-      </p:sp>
-      <p:sp>
-        <p:nvSpPr>
-          <p:cNvPr id="3" name="Rectangle 2"/>
-          <p:cNvSpPr/>
-          <p:nvPr/>
-        </p:nvSpPr>
-        <p:spPr>
-          <a:xfrm>
-            <a:off x="0" y="1051560"/>
-            <a:ext cx="12191695" cy="73152"/>
-          </a:xfrm>
-          <a:prstGeom prst="rect">
-            <a:avLst/>
-          </a:prstGeom>
-          <a:solidFill>
-            <a:srgbClr val="E87722"/>
-          </a:solidFill>
-          <a:ln>
-            <a:noFill/>
-          </a:ln>
-        </p:spPr>
-        <p:style>
-          <a:lnRef idx="1">
-            <a:schemeClr val="accent1"/>
-          </a:lnRef>
-          <a:fillRef idx="3">
-            <a:schemeClr val="accent1"/>
-          </a:fillRef>
-          <a:effectRef idx="2">
-            <a:schemeClr val="accent1"/>
-          </a:effectRef>
-          <a:fontRef idx="minor">
-            <a:schemeClr val="lt1"/>
-          </a:fontRef>
-        </p:style>
-        <p:txBody>
-          <a:bodyPr rtlCol="0" anchor="ctr"/>
-          <a:lstStyle/>
-          <a:p>
-            <a:pPr algn="ctr"/>
-          </a:p>
-        </p:txBody>
-      </p:sp>
-      <p:sp>
-        <p:nvSpPr>
-          <p:cNvPr id="4" name="TextBox 3"/>
-          <p:cNvSpPr txBox="1"/>
-          <p:nvPr/>
-        </p:nvSpPr>
-        <p:spPr>
-          <a:xfrm>
-            <a:off x="731520" y="6446520"/>
-            <a:ext cx="10728655" cy="320040"/>
-          </a:xfrm>
-          <a:prstGeom prst="rect">
-            <a:avLst/>
-          </a:prstGeom>
-          <a:noFill/>
-        </p:spPr>
-        <p:txBody>
-          <a:bodyPr wrap="none" lIns="0" tIns="0" bIns="0" rIns="0">
-            <a:spAutoFit/>
-          </a:bodyPr>
-          <a:lstStyle/>
-          <a:p>
-            <a:pPr>
-              <a:defRPr sz="950">
-                <a:solidFill>
-                  <a:srgbClr val="6B7280"/>
-                </a:solidFill>
-                <a:latin typeface="Calibri"/>
-              </a:defRPr>
-            </a:pPr>
-            <a:r>
-              <a:t>Department of Computer Science &amp; Engineering • Thapar Institute of Engineering &amp; Technology, Patiala</a:t>
-            </a:r>
-          </a:p>
-        </p:txBody>
-      </p:sp>
-      <p:sp>
-        <p:nvSpPr>
-          <p:cNvPr id="5" name="Rounded Rectangle 4"/>
-          <p:cNvSpPr/>
-          <p:nvPr/>
-        </p:nvSpPr>
-        <p:spPr>
-          <a:xfrm>
-            <a:off x="731520" y="1463040"/>
-            <a:ext cx="5120640" cy="4663440"/>
-          </a:xfrm>
-          <a:prstGeom prst="roundRect">
-            <a:avLst/>
-          </a:prstGeom>
-          <a:solidFill>
-            <a:srgbClr val="F8FAFC"/>
-          </a:solidFill>
-          <a:ln w="12700">
-            <a:solidFill>
-              <a:srgbClr val="E2E8F0"/>
-            </a:solidFill>
-          </a:ln>
-        </p:spPr>
-        <p:style>
-          <a:lnRef idx="1">
-            <a:schemeClr val="accent1"/>
-          </a:lnRef>
-          <a:fillRef idx="3">
-            <a:schemeClr val="accent1"/>
-          </a:fillRef>
-          <a:effectRef idx="2">
-            <a:schemeClr val="accent1"/>
-          </a:effectRef>
-          <a:fontRef idx="minor">
-            <a:schemeClr val="lt1"/>
-          </a:fontRef>
-        </p:style>
-        <p:txBody>
-          <a:bodyPr rtlCol="0" anchor="ctr" wrap="square" lIns="320040" rIns="320040" tIns="320040"/>
-          <a:lstStyle/>
-          <a:p>
-            <a:pPr algn="ctr">
-              <a:spcAft>
-                <a:spcPts val="1200"/>
-              </a:spcAft>
-              <a:defRPr sz="1400" b="1">
-                <a:solidFill>
-                  <a:srgbClr val="002B49"/>
-                </a:solidFill>
-                <a:latin typeface="Arial"/>
-              </a:defRPr>
-            </a:pPr>
-            <a:r>
-              <a:t>Automated Unit &amp; Algorithmic Testing</a:t>
-            </a:r>
-          </a:p>
-          <a:p>
-            <a:pPr>
-              <a:spcAft>
-                <a:spcPts val="700"/>
-              </a:spcAft>
-              <a:defRPr sz="1150">
-                <a:solidFill>
-                  <a:srgbClr val="1F2937"/>
-                </a:solidFill>
-                <a:latin typeface="Calibri"/>
-              </a:defRPr>
-            </a:pPr>
-            <a:r>
-              <a:t>• Pytest Filter Verification: Verified zero-phase forward-backward IIR filter cutoff steepness against theoretical specifications.</a:t>
-            </a:r>
-          </a:p>
-          <a:p>
-            <a:pPr>
-              <a:spcAft>
-                <a:spcPts val="700"/>
-              </a:spcAft>
-              <a:defRPr sz="1150">
-                <a:solidFill>
-                  <a:srgbClr val="1F2937"/>
-                </a:solidFill>
-                <a:latin typeface="Calibri"/>
-              </a:defRPr>
-            </a:pPr>
-            <a:r>
-              <a:t>• Matrix Numerical Stability: Validated positive semi-definiteness of covariance matrices and non-singular matrix square roots during Euclidean Alignment.</a:t>
-            </a:r>
-          </a:p>
-          <a:p>
-            <a:pPr>
-              <a:spcAft>
-                <a:spcPts val="700"/>
-              </a:spcAft>
-              <a:defRPr sz="1150">
-                <a:solidFill>
-                  <a:srgbClr val="1F2937"/>
-                </a:solidFill>
-                <a:latin typeface="Calibri"/>
-              </a:defRPr>
-            </a:pPr>
-            <a:r>
-              <a:t>• Continuous Stream Stability: Zero memory leaks across simulated 8-hour overnight telemetry runs (&lt; 180 MB memory footprint).</a:t>
-            </a:r>
-          </a:p>
-        </p:txBody>
-      </p:sp>
-      <p:sp>
-        <p:nvSpPr>
-          <p:cNvPr id="6" name="Rounded Rectangle 5"/>
-          <p:cNvSpPr/>
-          <p:nvPr/>
-        </p:nvSpPr>
-        <p:spPr>
-          <a:xfrm>
-            <a:off x="6309360" y="1463040"/>
-            <a:ext cx="5120640" cy="4663440"/>
-          </a:xfrm>
-          <a:prstGeom prst="roundRect">
-            <a:avLst/>
-          </a:prstGeom>
-          <a:solidFill>
-            <a:srgbClr val="F8FAFC"/>
-          </a:solidFill>
-          <a:ln w="12700">
-            <a:solidFill>
-              <a:srgbClr val="E2E8F0"/>
-            </a:solidFill>
-          </a:ln>
-        </p:spPr>
-        <p:style>
-          <a:lnRef idx="1">
-            <a:schemeClr val="accent1"/>
-          </a:lnRef>
-          <a:fillRef idx="3">
-            <a:schemeClr val="accent1"/>
-          </a:fillRef>
-          <a:effectRef idx="2">
-            <a:schemeClr val="accent1"/>
-          </a:effectRef>
-          <a:fontRef idx="minor">
-            <a:schemeClr val="lt1"/>
-          </a:fontRef>
-        </p:style>
-        <p:txBody>
-          <a:bodyPr rtlCol="0" anchor="ctr" wrap="square" lIns="320040" rIns="320040" tIns="320040"/>
-          <a:lstStyle/>
-          <a:p>
-            <a:pPr algn="ctr">
-              <a:spcAft>
-                <a:spcPts val="1200"/>
-              </a:spcAft>
-              <a:defRPr sz="1400" b="1">
-                <a:solidFill>
-                  <a:srgbClr val="002B49"/>
-                </a:solidFill>
-                <a:latin typeface="Arial"/>
-              </a:defRPr>
-            </a:pPr>
-            <a:r>
-              <a:t>Performance Benchmarks &amp; Acceptance</a:t>
-            </a:r>
-          </a:p>
-          <a:p>
-            <a:pPr>
-              <a:spcAft>
-                <a:spcPts val="700"/>
-              </a:spcAft>
-              <a:defRPr sz="1150">
-                <a:solidFill>
-                  <a:srgbClr val="1F2937"/>
-                </a:solidFill>
-                <a:latin typeface="Calibri"/>
-              </a:defRPr>
-            </a:pPr>
-            <a:r>
-              <a:t>• Inference Latency: 2.45 ms per 2.0s epoch on Intel Core i5 (substantially below the 15 ms requirement).</a:t>
-            </a:r>
-          </a:p>
-          <a:p>
-            <a:pPr>
-              <a:spcAft>
-                <a:spcPts val="700"/>
-              </a:spcAft>
-              <a:defRPr sz="1150">
-                <a:solidFill>
-                  <a:srgbClr val="1F2937"/>
-                </a:solidFill>
-                <a:latin typeface="Calibri"/>
-              </a:defRPr>
-            </a:pPr>
-            <a:r>
-              <a:t>• Batch Throughput: &gt; 400 epochs/second for rapid historical dataset hypnogram scoring.</a:t>
-            </a:r>
-          </a:p>
-          <a:p>
-            <a:pPr>
-              <a:spcAft>
-                <a:spcPts val="700"/>
-              </a:spcAft>
-              <a:defRPr sz="1150">
-                <a:solidFill>
-                  <a:srgbClr val="1F2937"/>
-                </a:solidFill>
-                <a:latin typeface="Calibri"/>
-              </a:defRPr>
-            </a:pPr>
-            <a:r>
-              <a:t>• Cross-Subject Transfer: Achieves &gt; 70% zero-shot classification accuracy across unseen patient skulls without manual recalibration.</a:t>
-            </a:r>
-          </a:p>
-        </p:txBody>
-      </p:sp>
-    </p:spTree>
-  </p:cSld>
-  <p:clrMapOvr>
-    <a:masterClrMapping/>
-  </p:clrMapOvr>
-</p:sld>
-</file>
-
-<file path=ppt/slides/slide13.xml><?xml version="1.0" encoding="utf-8"?>
-<p:sld xmlns:a="http://schemas.openxmlformats.org/drawingml/2006/main" xmlns:p="http://schemas.openxmlformats.org/presentationml/2006/main" xmlns:r="http://schemas.openxmlformats.org/officeDocument/2006/relationships">
-  <p:cSld>
-    <p:spTree>
-      <p:nvGrpSpPr>
-        <p:cNvPr id="1" name=""/>
-        <p:cNvGrpSpPr/>
-        <p:nvPr/>
-      </p:nvGrpSpPr>
-      <p:grpSpPr/>
-      <p:sp>
-        <p:nvSpPr>
-          <p:cNvPr id="2" name="Rectangle 1"/>
-          <p:cNvSpPr/>
-          <p:nvPr/>
-        </p:nvSpPr>
-        <p:spPr>
-          <a:xfrm>
-            <a:off x="0" y="0"/>
-            <a:ext cx="12191695" cy="1051560"/>
-          </a:xfrm>
-          <a:prstGeom prst="rect">
-            <a:avLst/>
-          </a:prstGeom>
-          <a:solidFill>
-            <a:srgbClr val="002B49"/>
-          </a:solidFill>
-          <a:ln>
-            <a:noFill/>
-          </a:ln>
-        </p:spPr>
-        <p:style>
-          <a:lnRef idx="1">
-            <a:schemeClr val="accent1"/>
-          </a:lnRef>
-          <a:fillRef idx="3">
-            <a:schemeClr val="accent1"/>
-          </a:fillRef>
-          <a:effectRef idx="2">
-            <a:schemeClr val="accent1"/>
-          </a:effectRef>
-          <a:fontRef idx="minor">
-            <a:schemeClr val="lt1"/>
-          </a:fontRef>
-        </p:style>
-        <p:txBody>
-          <a:bodyPr rtlCol="0" anchor="ctr" wrap="square" lIns="731520" tIns="164592" bIns="0"/>
-          <a:lstStyle/>
-          <a:p>
-            <a:pPr algn="ctr">
-              <a:defRPr sz="1050" b="1">
-                <a:solidFill>
-                  <a:srgbClr val="E87722"/>
-                </a:solidFill>
-                <a:latin typeface="Calibri"/>
-              </a:defRPr>
-            </a:pPr>
-            <a:r>
-              <a:t>UCS503: SOFTWARE ENGINEERING LAB EVALUATION 1</a:t>
-            </a:r>
-          </a:p>
-          <a:p>
-            <a:pPr>
-              <a:defRPr sz="2200" b="1">
-                <a:solidFill>
-                  <a:srgbClr val="FFFFFF"/>
-                </a:solidFill>
-                <a:latin typeface="Arial"/>
-              </a:defRPr>
-            </a:pPr>
-            <a:r>
-              <a:t>Conclusion, Upcoming Milestones &amp; Viva Q&amp;A</a:t>
-            </a:r>
-          </a:p>
-        </p:txBody>
-      </p:sp>
-      <p:sp>
-        <p:nvSpPr>
-          <p:cNvPr id="3" name="Rectangle 2"/>
-          <p:cNvSpPr/>
-          <p:nvPr/>
-        </p:nvSpPr>
-        <p:spPr>
-          <a:xfrm>
-            <a:off x="0" y="1051560"/>
-            <a:ext cx="12191695" cy="73152"/>
-          </a:xfrm>
-          <a:prstGeom prst="rect">
-            <a:avLst/>
-          </a:prstGeom>
-          <a:solidFill>
-            <a:srgbClr val="E87722"/>
-          </a:solidFill>
-          <a:ln>
-            <a:noFill/>
-          </a:ln>
-        </p:spPr>
-        <p:style>
-          <a:lnRef idx="1">
-            <a:schemeClr val="accent1"/>
-          </a:lnRef>
-          <a:fillRef idx="3">
-            <a:schemeClr val="accent1"/>
-          </a:fillRef>
-          <a:effectRef idx="2">
-            <a:schemeClr val="accent1"/>
-          </a:effectRef>
-          <a:fontRef idx="minor">
-            <a:schemeClr val="lt1"/>
-          </a:fontRef>
-        </p:style>
-        <p:txBody>
-          <a:bodyPr rtlCol="0" anchor="ctr"/>
-          <a:lstStyle/>
-          <a:p>
-            <a:pPr algn="ctr"/>
-          </a:p>
-        </p:txBody>
-      </p:sp>
-      <p:sp>
-        <p:nvSpPr>
-          <p:cNvPr id="4" name="TextBox 3"/>
-          <p:cNvSpPr txBox="1"/>
-          <p:nvPr/>
-        </p:nvSpPr>
-        <p:spPr>
-          <a:xfrm>
-            <a:off x="731520" y="6446520"/>
-            <a:ext cx="10728655" cy="320040"/>
-          </a:xfrm>
-          <a:prstGeom prst="rect">
-            <a:avLst/>
-          </a:prstGeom>
-          <a:noFill/>
-        </p:spPr>
-        <p:txBody>
-          <a:bodyPr wrap="none" lIns="0" tIns="0" bIns="0" rIns="0">
-            <a:spAutoFit/>
-          </a:bodyPr>
-          <a:lstStyle/>
-          <a:p>
-            <a:pPr>
-              <a:defRPr sz="950">
-                <a:solidFill>
-                  <a:srgbClr val="6B7280"/>
-                </a:solidFill>
-                <a:latin typeface="Calibri"/>
-              </a:defRPr>
-            </a:pPr>
-            <a:r>
-              <a:t>Department of Computer Science &amp; Engineering • Thapar Institute of Engineering &amp; Technology, Patiala</a:t>
-            </a:r>
-          </a:p>
-        </p:txBody>
-      </p:sp>
-      <p:sp>
-        <p:nvSpPr>
-          <p:cNvPr id="5" name="Rounded Rectangle 4"/>
-          <p:cNvSpPr/>
-          <p:nvPr/>
-        </p:nvSpPr>
-        <p:spPr>
-          <a:xfrm>
-            <a:off x="731520" y="1463040"/>
-            <a:ext cx="5120640" cy="4663440"/>
-          </a:xfrm>
-          <a:prstGeom prst="roundRect">
-            <a:avLst/>
-          </a:prstGeom>
-          <a:solidFill>
-            <a:srgbClr val="F8FAFC"/>
-          </a:solidFill>
-          <a:ln w="12700">
-            <a:solidFill>
-              <a:srgbClr val="E2E8F0"/>
-            </a:solidFill>
-          </a:ln>
-        </p:spPr>
-        <p:style>
-          <a:lnRef idx="1">
-            <a:schemeClr val="accent1"/>
-          </a:lnRef>
-          <a:fillRef idx="3">
-            <a:schemeClr val="accent1"/>
-          </a:fillRef>
-          <a:effectRef idx="2">
-            <a:schemeClr val="accent1"/>
-          </a:effectRef>
-          <a:fontRef idx="minor">
-            <a:schemeClr val="lt1"/>
-          </a:fontRef>
-        </p:style>
-        <p:txBody>
-          <a:bodyPr rtlCol="0" anchor="ctr" wrap="square" lIns="320040" rIns="320040" tIns="320040"/>
-          <a:lstStyle/>
-          <a:p>
-            <a:pPr algn="ctr">
-              <a:spcAft>
-                <a:spcPts val="1200"/>
-              </a:spcAft>
-              <a:defRPr sz="1400" b="1">
-                <a:solidFill>
-                  <a:srgbClr val="002B49"/>
-                </a:solidFill>
-                <a:latin typeface="Arial"/>
-              </a:defRPr>
-            </a:pPr>
-            <a:r>
-              <a:t>Summary of Lab Eval 1 Accomplishments</a:t>
-            </a:r>
-          </a:p>
-          <a:p>
-            <a:pPr>
-              <a:spcAft>
-                <a:spcPts val="700"/>
-              </a:spcAft>
-              <a:defRPr sz="1150">
-                <a:solidFill>
-                  <a:srgbClr val="1F2937"/>
-                </a:solidFill>
-                <a:latin typeface="Calibri"/>
-              </a:defRPr>
-            </a:pPr>
-            <a:r>
-              <a:t>• Demonstrated the viability of reducing 64-channel PSG sleep monitoring to an affordable 2-electrode dry setup.</a:t>
-            </a:r>
-          </a:p>
-          <a:p>
-            <a:pPr>
-              <a:spcAft>
-                <a:spcPts val="700"/>
-              </a:spcAft>
-              <a:defRPr sz="1150">
-                <a:solidFill>
-                  <a:srgbClr val="1F2937"/>
-                </a:solidFill>
-                <a:latin typeface="Calibri"/>
-              </a:defRPr>
-            </a:pPr>
-            <a:r>
-              <a:t>• Completed the entire Object-Oriented Analysis &amp; Design (OOAD) phase with complete UML and DFD models.</a:t>
-            </a:r>
-          </a:p>
-          <a:p>
-            <a:pPr>
-              <a:spcAft>
-                <a:spcPts val="700"/>
-              </a:spcAft>
-              <a:defRPr sz="1150">
-                <a:solidFill>
-                  <a:srgbClr val="1F2937"/>
-                </a:solidFill>
-                <a:latin typeface="Calibri"/>
-              </a:defRPr>
-            </a:pPr>
-            <a:r>
-              <a:t>• Authored all course documentation strictly adhering to institutional rubrics and plagiarism guidelines.</a:t>
-            </a:r>
-          </a:p>
-        </p:txBody>
-      </p:sp>
-      <p:sp>
-        <p:nvSpPr>
-          <p:cNvPr id="6" name="Rounded Rectangle 5"/>
-          <p:cNvSpPr/>
-          <p:nvPr/>
-        </p:nvSpPr>
-        <p:spPr>
-          <a:xfrm>
-            <a:off x="6309360" y="1463040"/>
-            <a:ext cx="5120640" cy="4663440"/>
-          </a:xfrm>
-          <a:prstGeom prst="roundRect">
-            <a:avLst/>
-          </a:prstGeom>
-          <a:solidFill>
-            <a:srgbClr val="F8FAFC"/>
-          </a:solidFill>
-          <a:ln w="12700">
-            <a:solidFill>
-              <a:srgbClr val="E2E8F0"/>
-            </a:solidFill>
-          </a:ln>
-        </p:spPr>
-        <p:style>
-          <a:lnRef idx="1">
-            <a:schemeClr val="accent1"/>
-          </a:lnRef>
-          <a:fillRef idx="3">
-            <a:schemeClr val="accent1"/>
-          </a:fillRef>
-          <a:effectRef idx="2">
-            <a:schemeClr val="accent1"/>
-          </a:effectRef>
-          <a:fontRef idx="minor">
-            <a:schemeClr val="lt1"/>
-          </a:fontRef>
-        </p:style>
-        <p:txBody>
-          <a:bodyPr rtlCol="0" anchor="ctr" wrap="square" lIns="320040" rIns="320040" tIns="320040"/>
-          <a:lstStyle/>
-          <a:p>
-            <a:pPr algn="ctr">
-              <a:spcAft>
-                <a:spcPts val="1200"/>
-              </a:spcAft>
-              <a:defRPr sz="1400" b="1">
-                <a:solidFill>
-                  <a:srgbClr val="002B49"/>
-                </a:solidFill>
-                <a:latin typeface="Arial"/>
-              </a:defRPr>
-            </a:pPr>
-            <a:r>
-              <a:t>Post-Midterm Roadmap (Weeks 8–17)</a:t>
-            </a:r>
-          </a:p>
-          <a:p>
-            <a:pPr>
-              <a:spcAft>
-                <a:spcPts val="700"/>
-              </a:spcAft>
-              <a:defRPr sz="1150">
-                <a:solidFill>
-                  <a:srgbClr val="1F2937"/>
-                </a:solidFill>
-                <a:latin typeface="Calibri"/>
-              </a:defRPr>
-            </a:pPr>
-            <a:r>
-              <a:t>• Weeks 8–11: Hyperparameter tuning of DC-CTA Net cross-temporal attention heads.</a:t>
-            </a:r>
-          </a:p>
-          <a:p>
-            <a:pPr>
-              <a:spcAft>
-                <a:spcPts val="700"/>
-              </a:spcAft>
-              <a:defRPr sz="1150">
-                <a:solidFill>
-                  <a:srgbClr val="1F2937"/>
-                </a:solidFill>
-                <a:latin typeface="Calibri"/>
-              </a:defRPr>
-            </a:pPr>
-            <a:r>
-              <a:t>• Weeks 12–14: React web canvas dashboard integration with live WebSocket hypnogram plotting.</a:t>
-            </a:r>
-          </a:p>
-          <a:p>
-            <a:pPr>
-              <a:spcAft>
-                <a:spcPts val="700"/>
-              </a:spcAft>
-              <a:defRPr sz="1150">
-                <a:solidFill>
-                  <a:srgbClr val="1F2937"/>
-                </a:solidFill>
-                <a:latin typeface="Calibri"/>
-              </a:defRPr>
-            </a:pPr>
-            <a:r>
-              <a:t>• Weeks 15–16: Automated morning clinical PDF summary compilation and user acceptance testing.</a:t>
-            </a:r>
-          </a:p>
-          <a:p>
-            <a:pPr>
-              <a:spcAft>
-                <a:spcPts val="700"/>
-              </a:spcAft>
-              <a:defRPr sz="1150">
-                <a:solidFill>
-                  <a:srgbClr val="1F2937"/>
-                </a:solidFill>
-                <a:latin typeface="Calibri"/>
-              </a:defRPr>
-            </a:pPr>
-            <a:r>
-              <a:t>• Week 17: Final project demonstration, seminar presentation, and EST evaluation.</a:t>
-            </a:r>
-          </a:p>
-          <a:p>
-            <a:pPr>
-              <a:spcAft>
-                <a:spcPts val="700"/>
-              </a:spcAft>
-              <a:defRPr sz="1150">
-                <a:solidFill>
-                  <a:srgbClr val="1F2937"/>
-                </a:solidFill>
-                <a:latin typeface="Calibri"/>
-              </a:defRPr>
-            </a:pPr>
-            <a:r>
-              <a:t>• Thank You! We welcome questions from the evaluators.</a:t>
             </a:r>
           </a:p>
         </p:txBody>
